--- a/Presentacion/Sistema_de_Estudio_PUCE.pptx
+++ b/Presentacion/Sistema_de_Estudio_PUCE.pptx
@@ -2459,6 +2459,18 @@
   <p:clrMapOvr>
     <a:masterClrMapping/>
   </p:clrMapOvr>
+  <mc:AlternateContent xmlns:mc="http://schemas.openxmlformats.org/markup-compatibility/2006">
+    <mc:Choice xmlns:p14="http://schemas.microsoft.com/office/powerpoint/2010/main" Requires="p14">
+      <p:transition spd="slow" p14:dur="800">
+        <p:fade/>
+      </p:transition>
+    </mc:Choice>
+    <mc:Fallback>
+      <p:transition spd="slow">
+        <p:fade/>
+      </p:transition>
+    </mc:Fallback>
+  </mc:AlternateContent>
 </p:sld>
 </file>
 
@@ -2691,6 +2703,18 @@
   <p:clrMapOvr>
     <a:masterClrMapping/>
   </p:clrMapOvr>
+  <mc:AlternateContent xmlns:mc="http://schemas.openxmlformats.org/markup-compatibility/2006">
+    <mc:Choice xmlns:p14="http://schemas.microsoft.com/office/powerpoint/2010/main" Requires="p14">
+      <p:transition spd="slow" p14:dur="900">
+        <p:cover dir="u"/>
+      </p:transition>
+    </mc:Choice>
+    <mc:Fallback>
+      <p:transition spd="slow">
+        <p:cover dir="u"/>
+      </p:transition>
+    </mc:Fallback>
+  </mc:AlternateContent>
 </p:sld>
 </file>
 
@@ -3945,6 +3969,18 @@
   <p:clrMapOvr>
     <a:masterClrMapping/>
   </p:clrMapOvr>
+  <mc:AlternateContent xmlns:mc="http://schemas.openxmlformats.org/markup-compatibility/2006">
+    <mc:Choice xmlns:p14="http://schemas.microsoft.com/office/powerpoint/2010/main" Requires="p14">
+      <p:transition spd="slow" p14:dur="800">
+        <p:fade/>
+      </p:transition>
+    </mc:Choice>
+    <mc:Fallback>
+      <p:transition spd="slow">
+        <p:fade/>
+      </p:transition>
+    </mc:Fallback>
+  </mc:AlternateContent>
 </p:sld>
 </file>
 
@@ -5434,6 +5470,18 @@
   <p:clrMapOvr>
     <a:masterClrMapping/>
   </p:clrMapOvr>
+  <mc:AlternateContent xmlns:mc="http://schemas.openxmlformats.org/markup-compatibility/2006">
+    <mc:Choice xmlns:p14="http://schemas.microsoft.com/office/powerpoint/2010/main" Requires="p14">
+      <p:transition spd="slow" p14:dur="800">
+        <p:fade/>
+      </p:transition>
+    </mc:Choice>
+    <mc:Fallback>
+      <p:transition spd="slow">
+        <p:fade/>
+      </p:transition>
+    </mc:Fallback>
+  </mc:AlternateContent>
 </p:sld>
 </file>
 
@@ -6559,6 +6607,18 @@
   <p:clrMapOvr>
     <a:masterClrMapping/>
   </p:clrMapOvr>
+  <mc:AlternateContent xmlns:mc="http://schemas.openxmlformats.org/markup-compatibility/2006">
+    <mc:Choice xmlns:p14="http://schemas.microsoft.com/office/powerpoint/2010/main" Requires="p14">
+      <p:transition spd="slow" p14:dur="800">
+        <p:fade/>
+      </p:transition>
+    </mc:Choice>
+    <mc:Fallback>
+      <p:transition spd="slow">
+        <p:fade/>
+      </p:transition>
+    </mc:Fallback>
+  </mc:AlternateContent>
 </p:sld>
 </file>
 
@@ -7357,6 +7417,18 @@
   <p:clrMapOvr>
     <a:masterClrMapping/>
   </p:clrMapOvr>
+  <mc:AlternateContent xmlns:mc="http://schemas.openxmlformats.org/markup-compatibility/2006">
+    <mc:Choice xmlns:p14="http://schemas.microsoft.com/office/powerpoint/2010/main" Requires="p14">
+      <p:transition spd="slow" p14:dur="800">
+        <p:fade/>
+      </p:transition>
+    </mc:Choice>
+    <mc:Fallback>
+      <p:transition spd="slow">
+        <p:fade/>
+      </p:transition>
+    </mc:Fallback>
+  </mc:AlternateContent>
 </p:sld>
 </file>
 
@@ -8000,6 +8072,18 @@
   <p:clrMapOvr>
     <a:masterClrMapping/>
   </p:clrMapOvr>
+  <mc:AlternateContent xmlns:mc="http://schemas.openxmlformats.org/markup-compatibility/2006">
+    <mc:Choice xmlns:p14="http://schemas.microsoft.com/office/powerpoint/2010/main" Requires="p14">
+      <p:transition spd="slow" p14:dur="800">
+        <p:fade/>
+      </p:transition>
+    </mc:Choice>
+    <mc:Fallback>
+      <p:transition spd="slow">
+        <p:fade/>
+      </p:transition>
+    </mc:Fallback>
+  </mc:AlternateContent>
 </p:sld>
 </file>
 
@@ -9026,6 +9110,18 @@
   <p:clrMapOvr>
     <a:masterClrMapping/>
   </p:clrMapOvr>
+  <mc:AlternateContent xmlns:mc="http://schemas.openxmlformats.org/markup-compatibility/2006">
+    <mc:Choice xmlns:p14="http://schemas.microsoft.com/office/powerpoint/2010/main" Requires="p14">
+      <p:transition spd="slow" p14:dur="800">
+        <p:fade/>
+      </p:transition>
+    </mc:Choice>
+    <mc:Fallback>
+      <p:transition spd="slow">
+        <p:fade/>
+      </p:transition>
+    </mc:Fallback>
+  </mc:AlternateContent>
 </p:sld>
 </file>
 
@@ -9929,6 +10025,18 @@
   <p:clrMapOvr>
     <a:masterClrMapping/>
   </p:clrMapOvr>
+  <mc:AlternateContent xmlns:mc="http://schemas.openxmlformats.org/markup-compatibility/2006">
+    <mc:Choice xmlns:p14="http://schemas.microsoft.com/office/powerpoint/2010/main" Requires="p14">
+      <p:transition spd="slow" p14:dur="800">
+        <p:fade/>
+      </p:transition>
+    </mc:Choice>
+    <mc:Fallback>
+      <p:transition spd="slow">
+        <p:fade/>
+      </p:transition>
+    </mc:Fallback>
+  </mc:AlternateContent>
 </p:sld>
 </file>
 
@@ -10161,6 +10269,18 @@
   <p:clrMapOvr>
     <a:masterClrMapping/>
   </p:clrMapOvr>
+  <mc:AlternateContent xmlns:mc="http://schemas.openxmlformats.org/markup-compatibility/2006">
+    <mc:Choice xmlns:p14="http://schemas.microsoft.com/office/powerpoint/2010/main" Requires="p14">
+      <p:transition spd="slow" p14:dur="900">
+        <p:cover dir="u"/>
+      </p:transition>
+    </mc:Choice>
+    <mc:Fallback>
+      <p:transition spd="slow">
+        <p:cover dir="u"/>
+      </p:transition>
+    </mc:Fallback>
+  </mc:AlternateContent>
 </p:sld>
 </file>
 
@@ -11011,6 +11131,18 @@
   <p:clrMapOvr>
     <a:masterClrMapping/>
   </p:clrMapOvr>
+  <mc:AlternateContent xmlns:mc="http://schemas.openxmlformats.org/markup-compatibility/2006">
+    <mc:Choice xmlns:p14="http://schemas.microsoft.com/office/powerpoint/2010/main" Requires="p14">
+      <p:transition spd="slow" p14:dur="800">
+        <p:fade/>
+      </p:transition>
+    </mc:Choice>
+    <mc:Fallback>
+      <p:transition spd="slow">
+        <p:fade/>
+      </p:transition>
+    </mc:Fallback>
+  </mc:AlternateContent>
 </p:sld>
 </file>
 
@@ -11804,6 +11936,18 @@
   <p:clrMapOvr>
     <a:masterClrMapping/>
   </p:clrMapOvr>
+  <mc:AlternateContent xmlns:mc="http://schemas.openxmlformats.org/markup-compatibility/2006">
+    <mc:Choice xmlns:p14="http://schemas.microsoft.com/office/powerpoint/2010/main" Requires="p14">
+      <p:transition spd="slow" p14:dur="900">
+        <p14:morph option="byObject"/>
+      </p:transition>
+    </mc:Choice>
+    <mc:Fallback>
+      <p:transition spd="slow">
+        <p:fade/>
+      </p:transition>
+    </mc:Fallback>
+  </mc:AlternateContent>
 </p:sld>
 </file>
 
@@ -12450,6 +12594,18 @@
   <p:clrMapOvr>
     <a:masterClrMapping/>
   </p:clrMapOvr>
+  <mc:AlternateContent xmlns:mc="http://schemas.openxmlformats.org/markup-compatibility/2006">
+    <mc:Choice xmlns:p14="http://schemas.microsoft.com/office/powerpoint/2010/main" Requires="p14">
+      <p:transition spd="slow" p14:dur="900">
+        <p14:morph option="byObject"/>
+      </p:transition>
+    </mc:Choice>
+    <mc:Fallback>
+      <p:transition spd="slow">
+        <p:fade/>
+      </p:transition>
+    </mc:Fallback>
+  </mc:AlternateContent>
 </p:sld>
 </file>
 
@@ -13378,6 +13534,18 @@
   <p:clrMapOvr>
     <a:masterClrMapping/>
   </p:clrMapOvr>
+  <mc:AlternateContent xmlns:mc="http://schemas.openxmlformats.org/markup-compatibility/2006">
+    <mc:Choice xmlns:p14="http://schemas.microsoft.com/office/powerpoint/2010/main" Requires="p14">
+      <p:transition spd="slow" p14:dur="900">
+        <p14:morph option="byObject"/>
+      </p:transition>
+    </mc:Choice>
+    <mc:Fallback>
+      <p:transition spd="slow">
+        <p:fade/>
+      </p:transition>
+    </mc:Fallback>
+  </mc:AlternateContent>
 </p:sld>
 </file>
 
@@ -14185,6 +14353,18 @@
   <p:clrMapOvr>
     <a:masterClrMapping/>
   </p:clrMapOvr>
+  <mc:AlternateContent xmlns:mc="http://schemas.openxmlformats.org/markup-compatibility/2006">
+    <mc:Choice xmlns:p14="http://schemas.microsoft.com/office/powerpoint/2010/main" Requires="p14">
+      <p:transition spd="slow" p14:dur="800">
+        <p:fade/>
+      </p:transition>
+    </mc:Choice>
+    <mc:Fallback>
+      <p:transition spd="slow">
+        <p:fade/>
+      </p:transition>
+    </mc:Fallback>
+  </mc:AlternateContent>
 </p:sld>
 </file>
 
